--- a/docs/PluginFence-pitch.pptx
+++ b/docs/PluginFence-pitch.pptx
@@ -2462,7 +2462,7 @@
                 <a:ea typeface="Calibri" pitchFamily="34" charset="-122"/>
                 <a:cs typeface="Calibri" pitchFamily="34" charset="-120"/>
               </a:rPr>
-              <a:t>github.com/bilal-feroz/Plugin-Fence   ·   IntelliJ Platform 2026.2   ·   JVM agent + Kotlin plugin   ·   MIT</a:t>
+              <a:t>github.com/bilal-feroz/PluginFence   ·   IntelliJ Platform 2026.2   ·   JVM agent + Kotlin plugin   ·   MIT</a:t>
             </a:r>
             <a:endParaRPr lang="en-US" sz="1100" dirty="0"/>
           </a:p>
@@ -9955,7 +9955,7 @@
                 <a:ea typeface="Calibri" pitchFamily="34" charset="-122"/>
                 <a:cs typeface="Calibri" pitchFamily="34" charset="-120"/>
               </a:rPr>
-              <a:t>github.com/bilal-feroz/Plugin-Fence   ·   MIT</a:t>
+              <a:t>github.com/bilal-feroz/PluginFence   ·   MIT</a:t>
             </a:r>
             <a:endParaRPr lang="en-US" sz="1200" dirty="0"/>
           </a:p>

--- a/docs/PluginFence-pitch.pptx
+++ b/docs/PluginFence-pitch.pptx
@@ -3637,7 +3637,7 @@
                 <a:ea typeface="Calibri" pitchFamily="34" charset="-122"/>
                 <a:cs typeface="Calibri" pitchFamily="34" charset="-120"/>
               </a:rPr>
-              <a:t>STATIC SCAN  /  AI MODEL</a:t>
+              <a:t>PREDICTION  /  STATIC SCAN</a:t>
             </a:r>
             <a:endParaRPr lang="en-US" sz="1100" dirty="0"/>
           </a:p>
@@ -4883,7 +4883,7 @@
                 <a:ea typeface="Calibri" pitchFamily="34" charset="-122"/>
                 <a:cs typeface="Calibri" pitchFamily="34" charset="-120"/>
               </a:rPr>
-              <a:t>Blocked operations never execute.  No LLM anywhere — detection, policy and blocking are deterministic and run locally.</a:t>
+              <a:t>Blocked operations never execute. Detection, policy and blocking are deterministic and local. The AI analyst sits on top: it investigates the evidence with tools and proposes — it never enforces.</a:t>
             </a:r>
             <a:endParaRPr lang="en-US" sz="1150" dirty="0"/>
           </a:p>
@@ -5032,7 +5032,7 @@
                 <a:ea typeface="Calibri" pitchFamily="34" charset="-122"/>
                 <a:cs typeface="Calibri" pitchFamily="34" charset="-120"/>
               </a:rPr>
-              <a:t>Three layers. No changes to the IDE platform, no changes to the plugins being watched.</a:t>
+              <a:t>Three layers plus an advisory AI analyst. No changes to the IDE platform, none to the plugins being watched.</a:t>
             </a:r>
             <a:endParaRPr lang="en-US" sz="1300" dirty="0"/>
           </a:p>
@@ -5794,7 +5794,7 @@
                 <a:ea typeface="Calibri" pitchFamily="34" charset="-122"/>
                 <a:cs typeface="Calibri" pitchFamily="34" charset="-120"/>
               </a:rPr>
-              <a:t>Native tool window: Overview · Activity · Permissions · Drift, with Allow Once / Always Allow / Keep Blocking</a:t>
+              <a:t>Native tool window: Overview · Activity · Permissions · Drift — plus the AI analyst: a tool-calling agent (OpenAI or a local model) that investigates incidents, updates and plugins and proposes the policy you apply with one click</a:t>
             </a:r>
             <a:endParaRPr lang="en-US" sz="1000" dirty="0"/>
           </a:p>
@@ -8595,7 +8595,7 @@
                 <a:ea typeface="Calibri" pitchFamily="34" charset="-122"/>
                 <a:cs typeface="Calibri" pitchFamily="34" charset="-120"/>
               </a:rPr>
-              <a:t>Privacy: nothing leaves the machine, secret values are never read or logged</a:t>
+              <a:t>Privacy: secret values are never read or logged; nothing leaves the machine unless the opt-in analyst is on — then only redacted metadata, or nothing at all with a local model</a:t>
             </a:r>
             <a:endParaRPr lang="en-US" sz="1050" dirty="0"/>
           </a:p>
@@ -8616,7 +8616,7 @@
                 <a:ea typeface="Calibri" pitchFamily="34" charset="-122"/>
                 <a:cs typeface="Calibri" pitchFamily="34" charset="-120"/>
               </a:rPr>
-              <a:t>MIT licensed</a:t>
+              <a:t>AI security analyst: OpenAI-compatible tool-calling agent with read-only tools (incident, baseline, drift, the plugin's real plugin.xml, policy), structured verdicts, one-click Apply · MIT licensed</a:t>
             </a:r>
             <a:endParaRPr lang="en-US" sz="1050" dirty="0"/>
           </a:p>
@@ -9037,7 +9037,7 @@
                 <a:ea typeface="Calibri" pitchFamily="34" charset="-122"/>
                 <a:cs typeface="Calibri" pitchFamily="34" charset="-120"/>
               </a:rPr>
-              <a:t>JSON incident export and a searchable cross-session timeline</a:t>
+              <a:t>Analyst memory across sessions and a Koog-based agent; searchable cross-session timeline</a:t>
             </a:r>
             <a:endParaRPr lang="en-US" sz="1050" dirty="0"/>
           </a:p>

--- a/docs/PluginFence-pitch.pptx
+++ b/docs/PluginFence-pitch.pptx
@@ -8616,7 +8616,7 @@
                 <a:ea typeface="Calibri" pitchFamily="34" charset="-122"/>
                 <a:cs typeface="Calibri" pitchFamily="34" charset="-120"/>
               </a:rPr>
-              <a:t>AI security analyst: OpenAI-compatible tool-calling agent with read-only tools (incident, baseline, drift, the plugin's real plugin.xml, policy), structured verdicts, one-click Apply · MIT licensed</a:t>
+              <a:t>AI security analyst: tool-calling agent over OpenAI / Groq / local models, read-only tools (incident, baseline, drift, the plugin's real plugin.xml, policy), structured verdicts, one-click Apply. Falls back to a backup model and then to PluginFence's own rules, so it has no failure state · MIT licensed</a:t>
             </a:r>
             <a:endParaRPr lang="en-US" sz="1050" dirty="0"/>
           </a:p>
